--- a/dist/초4/수학/자료와규칙/초4_수학_자료와규칙_02_꺾은선그래프_학생용.pptx
+++ b/dist/초4/수학/자료와규칙/초4_수학_자료와규칙_02_꺾은선그래프_학생용.pptx
@@ -120,13 +120,13 @@
   <p:extLst>
     <p:ext uri="{521415D9-36F7-43E2-AB2F-B90AF26B5E84}">
       <p14:sectionLst xmlns:p14="http://schemas.microsoft.com/office/powerpoint/2010/main">
-        <p14:section name="도입" id="{0bb7f6b4-0f52-916b-98f8-bea9d85e4c9d}">
+        <p14:section name="도입" id="{43dc7d7d-a76f-29fe-6134-444a872bcbdb}">
           <p14:sldIdLst>
             <p14:sldId id="256"/>
             <p14:sldId id="257"/>
           </p14:sldIdLst>
         </p14:section>
-        <p14:section name="개념" id="{6c6ff83e-be6e-7f95-12b1-639727f0fea0}">
+        <p14:section name="개념" id="{18937308-1f61-6d12-4030-7db69756ff2d}">
           <p14:sldIdLst>
             <p14:sldId id="258"/>
             <p14:sldId id="259"/>
@@ -135,31 +135,31 @@
             <p14:sldId id="264"/>
           </p14:sldIdLst>
         </p14:section>
-        <p14:section name="연습" id="{ff00c95f-066b-35e9-2972-c538da20f43f}">
+        <p14:section name="연습" id="{2fdddeaf-811d-069f-3e68-6d3dd7ecf97c}">
           <p14:sldIdLst>
             <p14:sldId id="261"/>
             <p14:sldId id="262"/>
             <p14:sldId id="265"/>
           </p14:sldIdLst>
         </p14:section>
-        <p14:section name="개념" id="{d13c0325-a100-ee51-3223-7af79f9dcfba}">
+        <p14:section name="개념" id="{bc2df2ab-e37a-83e4-136a-a584b3594552}">
           <p14:sldIdLst/>
         </p14:section>
-        <p14:section name="연습" id="{39a5f264-2351-5c54-e31a-ab417a53fe86}">
+        <p14:section name="연습" id="{1963739c-c0da-d473-471f-182514abc404}">
           <p14:sldIdLst/>
         </p14:section>
-        <p14:section name="확인" id="{fb44f08d-ee0b-8696-ae50-d31ddc3199d8}">
+        <p14:section name="확인" id="{9d90e9e7-96a4-cd62-b712-be91b479985c}">
           <p14:sldIdLst>
             <p14:sldId id="266"/>
             <p14:sldId id="267"/>
           </p14:sldIdLst>
         </p14:section>
-        <p14:section name="정리" id="{34f7b8dd-075c-aca1-b14f-af78f6244486}">
+        <p14:section name="정리" id="{f75d0e88-a838-b6c6-ea38-9b0245346340}">
           <p14:sldIdLst>
             <p14:sldId id="268"/>
           </p14:sldIdLst>
         </p14:section>
-        <p14:section name="보충" id="{c2625781-d544-1f29-b4c5-079093a2c30e}">
+        <p14:section name="보충" id="{71a10b1c-0160-0116-a3af-ec781aa1ada7}">
           <p14:sldIdLst>
             <p14:sldId id="269"/>
           </p14:sldIdLst>
